--- a/assets/figures-editable/c3-c4/c4-e34.pptx
+++ b/assets/figures-editable/c3-c4/c4-e34.pptx
@@ -3104,8 +3104,8 @@
         </p:nvSpPr>
         <p:spPr>
           <a:xfrm>
-            <a:off x="274320" y="137160"/>
-            <a:ext cx="11612880" cy="365760"/>
+            <a:off x="274320" y="118872"/>
+            <a:ext cx="11612880" cy="340105"/>
           </a:xfrm>
           <a:prstGeom prst="rect">
             <a:avLst/>
@@ -3114,7 +3114,7 @@
           <a:effectLst/>
         </p:spPr>
         <p:txBody>
-          <a:bodyPr wrap="square" lIns="27432" rIns="27432" tIns="18288" bIns="18288" anchor="ctr">
+          <a:bodyPr wrap="none" lIns="18288" rIns="18288" tIns="18288" bIns="18288" anchor="t">
             <a:spAutoFit/>
           </a:bodyPr>
           <a:lstStyle/>
@@ -3125,7 +3125,7 @@
               </a:spcAft>
             </a:pPr>
             <a:r>
-              <a:rPr sz="2100" b="0" i="0">
+              <a:rPr sz="1900" b="1" i="0">
                 <a:solidFill>
                   <a:srgbClr val="8EDBD4"/>
                 </a:solidFill>
@@ -3136,23 +3136,20 @@
           </a:p>
         </p:txBody>
       </p:sp>
-      <p:sp>
-        <p:nvSpPr>
-          <p:cNvPr id="3" name="C4-E34 rect 1" descr="sci-ppt:o001"/>
-          <p:cNvSpPr/>
-          <p:nvPr/>
-        </p:nvSpPr>
-        <p:spPr>
-          <a:xfrm>
-            <a:off x="1097280" y="914400"/>
-            <a:ext cx="1828800" cy="228600"/>
-          </a:xfrm>
-          <a:prstGeom prst="rect">
-            <a:avLst/>
-          </a:prstGeom>
-          <a:solidFill>
-            <a:srgbClr val="213E4B"/>
-          </a:solidFill>
+      <p:cxnSp>
+        <p:nvCxnSpPr>
+          <p:cNvPr id="3" name="C4-E34 line 1" descr="sci-ppt:o001"/>
+          <p:cNvCxnSpPr/>
+          <p:nvPr/>
+        </p:nvCxnSpPr>
+        <p:spPr>
+          <a:xfrm>
+            <a:off x="7315200" y="4846320"/>
+            <a:ext cx="4389120" cy="0"/>
+          </a:xfrm>
+          <a:prstGeom prst="line">
+            <a:avLst/>
+          </a:prstGeom>
           <a:ln w="19050">
             <a:solidFill>
               <a:srgbClr val="B4C7D2"/>
@@ -3160,31 +3157,21 @@
           </a:ln>
           <a:effectLst/>
         </p:spPr>
-        <p:txBody>
-          <a:bodyPr rtlCol="0" anchor="ctr"/>
-          <a:lstStyle/>
-          <a:p>
-            <a:pPr algn="ctr"/>
-          </a:p>
-        </p:txBody>
-      </p:sp>
-      <p:sp>
-        <p:nvSpPr>
-          <p:cNvPr id="4" name="C4-E34 rect 2" descr="sci-ppt:o002"/>
-          <p:cNvSpPr/>
-          <p:nvPr/>
-        </p:nvSpPr>
-        <p:spPr>
-          <a:xfrm>
-            <a:off x="914400" y="3383280"/>
-            <a:ext cx="10332720" cy="274320"/>
-          </a:xfrm>
-          <a:prstGeom prst="rect">
-            <a:avLst/>
-          </a:prstGeom>
-          <a:solidFill>
-            <a:srgbClr val="213E4B"/>
-          </a:solidFill>
+      </p:cxnSp>
+      <p:cxnSp>
+        <p:nvCxnSpPr>
+          <p:cNvPr id="4" name="C4-E34 line 2" descr="sci-ppt:o002"/>
+          <p:cNvCxnSpPr/>
+          <p:nvPr/>
+        </p:nvCxnSpPr>
+        <p:spPr>
+          <a:xfrm>
+            <a:off x="7315200" y="1371600"/>
+            <a:ext cx="0" cy="3474720"/>
+          </a:xfrm>
+          <a:prstGeom prst="line">
+            <a:avLst/>
+          </a:prstGeom>
           <a:ln w="19050">
             <a:solidFill>
               <a:srgbClr val="B4C7D2"/>
@@ -3192,14 +3179,7 @@
           </a:ln>
           <a:effectLst/>
         </p:spPr>
-        <p:txBody>
-          <a:bodyPr rtlCol="0" anchor="ctr"/>
-          <a:lstStyle/>
-          <a:p>
-            <a:pPr algn="ctr"/>
-          </a:p>
-        </p:txBody>
-      </p:sp>
+      </p:cxnSp>
       <p:cxnSp>
         <p:nvCxnSpPr>
           <p:cNvPr id="5" name="C4-E34 line 3" descr="sci-ppt:o003"/>
@@ -3208,13 +3188,13 @@
         </p:nvCxnSpPr>
         <p:spPr>
           <a:xfrm>
-            <a:off x="2011680" y="1234440"/>
-            <a:ext cx="0" cy="2103120"/>
+            <a:off x="7315200" y="4846320"/>
+            <a:ext cx="0" cy="64008"/>
           </a:xfrm>
           <a:prstGeom prst="line">
             <a:avLst/>
           </a:prstGeom>
-          <a:ln w="25400">
+          <a:ln w="12700">
             <a:solidFill>
               <a:srgbClr val="B4C7D2"/>
             </a:solidFill>
@@ -3224,45 +3204,105 @@
       </p:cxnSp>
       <p:cxnSp>
         <p:nvCxnSpPr>
-          <p:cNvPr id="6" name="C4-E34 arrow 4" descr="sci-ppt:o004"/>
+          <p:cNvPr id="6" name="C4-E34 line 4" descr="sci-ppt:o004"/>
           <p:cNvCxnSpPr/>
           <p:nvPr/>
         </p:nvCxnSpPr>
         <p:spPr>
           <a:xfrm>
-            <a:off x="2011680" y="1234440"/>
-            <a:ext cx="2560320" cy="2103120"/>
+            <a:off x="7315200" y="1371600"/>
+            <a:ext cx="0" cy="3474720"/>
           </a:xfrm>
           <a:prstGeom prst="line">
             <a:avLst/>
           </a:prstGeom>
-          <a:ln w="25400">
+          <a:ln w="7620">
             <a:solidFill>
-              <a:srgbClr val="8EDBD4"/>
+              <a:srgbClr val="2E4756"/>
             </a:solidFill>
-            <a:headEnd type="none" w="med" len="med"/>
-            <a:tailEnd type="triangle" w="med" len="med"/>
+          </a:ln>
+          <a:effectLst/>
+        </p:spPr>
+      </p:cxnSp>
+      <p:sp>
+        <p:nvSpPr>
+          <p:cNvPr id="7" name="C4-E34 text 5" descr="sci-ppt:o005"/>
+          <p:cNvSpPr txBox="1"/>
+          <p:nvPr/>
+        </p:nvSpPr>
+        <p:spPr>
+          <a:xfrm>
+            <a:off x="6858000" y="4928616"/>
+            <a:ext cx="914400" cy="208407"/>
+          </a:xfrm>
+          <a:prstGeom prst="rect">
+            <a:avLst/>
+          </a:prstGeom>
+          <a:noFill/>
+          <a:effectLst/>
+        </p:spPr>
+        <p:txBody>
+          <a:bodyPr wrap="none" lIns="18288" rIns="18288" tIns="18288" bIns="18288" anchor="t">
+            <a:spAutoFit/>
+          </a:bodyPr>
+          <a:lstStyle/>
+          <a:p>
+            <a:pPr algn="ctr">
+              <a:spcAft>
+                <a:spcPts val="0"/>
+              </a:spcAft>
+            </a:pPr>
+            <a:r>
+              <a:rPr sz="1050" b="0" i="0">
+                <a:solidFill>
+                  <a:srgbClr val="B4C7D2"/>
+                </a:solidFill>
+                <a:latin typeface="Arial"/>
+              </a:rPr>
+              <a:t>0</a:t>
+            </a:r>
+          </a:p>
+        </p:txBody>
+      </p:sp>
+      <p:cxnSp>
+        <p:nvCxnSpPr>
+          <p:cNvPr id="8" name="C4-E34 line 6" descr="sci-ppt:o006"/>
+          <p:cNvCxnSpPr/>
+          <p:nvPr/>
+        </p:nvCxnSpPr>
+        <p:spPr>
+          <a:xfrm>
+            <a:off x="8193024" y="4846320"/>
+            <a:ext cx="0" cy="64008"/>
+          </a:xfrm>
+          <a:prstGeom prst="line">
+            <a:avLst/>
+          </a:prstGeom>
+          <a:ln w="12700">
+            <a:solidFill>
+              <a:srgbClr val="B4C7D2"/>
+            </a:solidFill>
           </a:ln>
           <a:effectLst/>
         </p:spPr>
       </p:cxnSp>
       <p:cxnSp>
         <p:nvCxnSpPr>
-          <p:cNvPr id="7" name="C4-E34 line 5" descr="sci-ppt:o005"/>
+          <p:cNvPr id="9" name="C4-E34 line 7" descr="sci-ppt:o007"/>
           <p:cNvCxnSpPr/>
           <p:nvPr/>
         </p:nvCxnSpPr>
         <p:spPr>
           <a:xfrm>
-            <a:off x="2011680" y="3017520"/>
-            <a:ext cx="2560320" cy="0"/>
+            <a:off x="8193024" y="1371600"/>
+            <a:ext cx="0" cy="3474720"/>
           </a:xfrm>
           <a:prstGeom prst="line">
             <a:avLst/>
           </a:prstGeom>
-          <a:ln w="25400">
+          <a:ln w="7620">
             <a:solidFill>
-              <a:srgbClr val="8EDBD4"/>
+              <a:srgbClr val="2E4756"/>
             </a:solidFill>
           </a:ln>
           <a:effectLst/>
@@ -3270,14 +3310,14 @@
       </p:cxnSp>
       <p:sp>
         <p:nvSpPr>
-          <p:cNvPr id="8" name="C4-E34 text 6" descr="sci-ppt:o006"/>
+          <p:cNvPr id="10" name="C4-E34 text 8" descr="sci-ppt:o008"/>
           <p:cNvSpPr txBox="1"/>
           <p:nvPr/>
         </p:nvSpPr>
         <p:spPr>
           <a:xfrm>
-            <a:off x="2880360" y="2697480"/>
-            <a:ext cx="1828800" cy="274320"/>
+            <a:off x="7735824" y="4928616"/>
+            <a:ext cx="914400" cy="208407"/>
           </a:xfrm>
           <a:prstGeom prst="rect">
             <a:avLst/>
@@ -3286,7 +3326,781 @@
           <a:effectLst/>
         </p:spPr>
         <p:txBody>
-          <a:bodyPr wrap="square" lIns="27432" rIns="27432" tIns="18288" bIns="18288" anchor="ctr">
+          <a:bodyPr wrap="none" lIns="18288" rIns="18288" tIns="18288" bIns="18288" anchor="t">
+            <a:spAutoFit/>
+          </a:bodyPr>
+          <a:lstStyle/>
+          <a:p>
+            <a:pPr algn="ctr">
+              <a:spcAft>
+                <a:spcPts val="0"/>
+              </a:spcAft>
+            </a:pPr>
+            <a:r>
+              <a:rPr sz="1050" b="0" i="0">
+                <a:solidFill>
+                  <a:srgbClr val="B4C7D2"/>
+                </a:solidFill>
+                <a:latin typeface="Arial"/>
+              </a:rPr>
+              <a:t>1</a:t>
+            </a:r>
+          </a:p>
+        </p:txBody>
+      </p:sp>
+      <p:cxnSp>
+        <p:nvCxnSpPr>
+          <p:cNvPr id="11" name="C4-E34 line 9" descr="sci-ppt:o009"/>
+          <p:cNvCxnSpPr/>
+          <p:nvPr/>
+        </p:nvCxnSpPr>
+        <p:spPr>
+          <a:xfrm>
+            <a:off x="9070848" y="4846320"/>
+            <a:ext cx="0" cy="64008"/>
+          </a:xfrm>
+          <a:prstGeom prst="line">
+            <a:avLst/>
+          </a:prstGeom>
+          <a:ln w="12700">
+            <a:solidFill>
+              <a:srgbClr val="B4C7D2"/>
+            </a:solidFill>
+          </a:ln>
+          <a:effectLst/>
+        </p:spPr>
+      </p:cxnSp>
+      <p:cxnSp>
+        <p:nvCxnSpPr>
+          <p:cNvPr id="12" name="C4-E34 line 10" descr="sci-ppt:o010"/>
+          <p:cNvCxnSpPr/>
+          <p:nvPr/>
+        </p:nvCxnSpPr>
+        <p:spPr>
+          <a:xfrm>
+            <a:off x="9070848" y="1371600"/>
+            <a:ext cx="0" cy="3474720"/>
+          </a:xfrm>
+          <a:prstGeom prst="line">
+            <a:avLst/>
+          </a:prstGeom>
+          <a:ln w="7620">
+            <a:solidFill>
+              <a:srgbClr val="2E4756"/>
+            </a:solidFill>
+          </a:ln>
+          <a:effectLst/>
+        </p:spPr>
+      </p:cxnSp>
+      <p:sp>
+        <p:nvSpPr>
+          <p:cNvPr id="13" name="C4-E34 text 11" descr="sci-ppt:o011"/>
+          <p:cNvSpPr txBox="1"/>
+          <p:nvPr/>
+        </p:nvSpPr>
+        <p:spPr>
+          <a:xfrm>
+            <a:off x="8613648" y="4928616"/>
+            <a:ext cx="914400" cy="208407"/>
+          </a:xfrm>
+          <a:prstGeom prst="rect">
+            <a:avLst/>
+          </a:prstGeom>
+          <a:noFill/>
+          <a:effectLst/>
+        </p:spPr>
+        <p:txBody>
+          <a:bodyPr wrap="none" lIns="18288" rIns="18288" tIns="18288" bIns="18288" anchor="t">
+            <a:spAutoFit/>
+          </a:bodyPr>
+          <a:lstStyle/>
+          <a:p>
+            <a:pPr algn="ctr">
+              <a:spcAft>
+                <a:spcPts val="0"/>
+              </a:spcAft>
+            </a:pPr>
+            <a:r>
+              <a:rPr sz="1050" b="0" i="0">
+                <a:solidFill>
+                  <a:srgbClr val="B4C7D2"/>
+                </a:solidFill>
+                <a:latin typeface="Arial"/>
+              </a:rPr>
+              <a:t>2</a:t>
+            </a:r>
+          </a:p>
+        </p:txBody>
+      </p:sp>
+      <p:cxnSp>
+        <p:nvCxnSpPr>
+          <p:cNvPr id="14" name="C4-E34 line 12" descr="sci-ppt:o012"/>
+          <p:cNvCxnSpPr/>
+          <p:nvPr/>
+        </p:nvCxnSpPr>
+        <p:spPr>
+          <a:xfrm>
+            <a:off x="9948672" y="4846320"/>
+            <a:ext cx="0" cy="64008"/>
+          </a:xfrm>
+          <a:prstGeom prst="line">
+            <a:avLst/>
+          </a:prstGeom>
+          <a:ln w="12700">
+            <a:solidFill>
+              <a:srgbClr val="B4C7D2"/>
+            </a:solidFill>
+          </a:ln>
+          <a:effectLst/>
+        </p:spPr>
+      </p:cxnSp>
+      <p:cxnSp>
+        <p:nvCxnSpPr>
+          <p:cNvPr id="15" name="C4-E34 line 13" descr="sci-ppt:o013"/>
+          <p:cNvCxnSpPr/>
+          <p:nvPr/>
+        </p:nvCxnSpPr>
+        <p:spPr>
+          <a:xfrm>
+            <a:off x="9948672" y="1371600"/>
+            <a:ext cx="0" cy="3474720"/>
+          </a:xfrm>
+          <a:prstGeom prst="line">
+            <a:avLst/>
+          </a:prstGeom>
+          <a:ln w="7620">
+            <a:solidFill>
+              <a:srgbClr val="2E4756"/>
+            </a:solidFill>
+          </a:ln>
+          <a:effectLst/>
+        </p:spPr>
+      </p:cxnSp>
+      <p:sp>
+        <p:nvSpPr>
+          <p:cNvPr id="16" name="C4-E34 text 14" descr="sci-ppt:o014"/>
+          <p:cNvSpPr txBox="1"/>
+          <p:nvPr/>
+        </p:nvSpPr>
+        <p:spPr>
+          <a:xfrm>
+            <a:off x="9491472" y="4928616"/>
+            <a:ext cx="914400" cy="208407"/>
+          </a:xfrm>
+          <a:prstGeom prst="rect">
+            <a:avLst/>
+          </a:prstGeom>
+          <a:noFill/>
+          <a:effectLst/>
+        </p:spPr>
+        <p:txBody>
+          <a:bodyPr wrap="none" lIns="18288" rIns="18288" tIns="18288" bIns="18288" anchor="t">
+            <a:spAutoFit/>
+          </a:bodyPr>
+          <a:lstStyle/>
+          <a:p>
+            <a:pPr algn="ctr">
+              <a:spcAft>
+                <a:spcPts val="0"/>
+              </a:spcAft>
+            </a:pPr>
+            <a:r>
+              <a:rPr sz="1050" b="0" i="0">
+                <a:solidFill>
+                  <a:srgbClr val="B4C7D2"/>
+                </a:solidFill>
+                <a:latin typeface="Arial"/>
+              </a:rPr>
+              <a:t>3</a:t>
+            </a:r>
+          </a:p>
+        </p:txBody>
+      </p:sp>
+      <p:cxnSp>
+        <p:nvCxnSpPr>
+          <p:cNvPr id="17" name="C4-E34 line 15" descr="sci-ppt:o015"/>
+          <p:cNvCxnSpPr/>
+          <p:nvPr/>
+        </p:nvCxnSpPr>
+        <p:spPr>
+          <a:xfrm>
+            <a:off x="10826496" y="4846320"/>
+            <a:ext cx="0" cy="64008"/>
+          </a:xfrm>
+          <a:prstGeom prst="line">
+            <a:avLst/>
+          </a:prstGeom>
+          <a:ln w="12700">
+            <a:solidFill>
+              <a:srgbClr val="B4C7D2"/>
+            </a:solidFill>
+          </a:ln>
+          <a:effectLst/>
+        </p:spPr>
+      </p:cxnSp>
+      <p:cxnSp>
+        <p:nvCxnSpPr>
+          <p:cNvPr id="18" name="C4-E34 line 16" descr="sci-ppt:o016"/>
+          <p:cNvCxnSpPr/>
+          <p:nvPr/>
+        </p:nvCxnSpPr>
+        <p:spPr>
+          <a:xfrm>
+            <a:off x="10826496" y="1371600"/>
+            <a:ext cx="0" cy="3474720"/>
+          </a:xfrm>
+          <a:prstGeom prst="line">
+            <a:avLst/>
+          </a:prstGeom>
+          <a:ln w="7620">
+            <a:solidFill>
+              <a:srgbClr val="2E4756"/>
+            </a:solidFill>
+          </a:ln>
+          <a:effectLst/>
+        </p:spPr>
+      </p:cxnSp>
+      <p:sp>
+        <p:nvSpPr>
+          <p:cNvPr id="19" name="C4-E34 text 17" descr="sci-ppt:o017"/>
+          <p:cNvSpPr txBox="1"/>
+          <p:nvPr/>
+        </p:nvSpPr>
+        <p:spPr>
+          <a:xfrm>
+            <a:off x="10369296" y="4928616"/>
+            <a:ext cx="914400" cy="208407"/>
+          </a:xfrm>
+          <a:prstGeom prst="rect">
+            <a:avLst/>
+          </a:prstGeom>
+          <a:noFill/>
+          <a:effectLst/>
+        </p:spPr>
+        <p:txBody>
+          <a:bodyPr wrap="none" lIns="18288" rIns="18288" tIns="18288" bIns="18288" anchor="t">
+            <a:spAutoFit/>
+          </a:bodyPr>
+          <a:lstStyle/>
+          <a:p>
+            <a:pPr algn="ctr">
+              <a:spcAft>
+                <a:spcPts val="0"/>
+              </a:spcAft>
+            </a:pPr>
+            <a:r>
+              <a:rPr sz="1050" b="0" i="0">
+                <a:solidFill>
+                  <a:srgbClr val="B4C7D2"/>
+                </a:solidFill>
+                <a:latin typeface="Arial"/>
+              </a:rPr>
+              <a:t>4</a:t>
+            </a:r>
+          </a:p>
+        </p:txBody>
+      </p:sp>
+      <p:cxnSp>
+        <p:nvCxnSpPr>
+          <p:cNvPr id="20" name="C4-E34 line 18" descr="sci-ppt:o018"/>
+          <p:cNvCxnSpPr/>
+          <p:nvPr/>
+        </p:nvCxnSpPr>
+        <p:spPr>
+          <a:xfrm>
+            <a:off x="11704320" y="4846320"/>
+            <a:ext cx="0" cy="64008"/>
+          </a:xfrm>
+          <a:prstGeom prst="line">
+            <a:avLst/>
+          </a:prstGeom>
+          <a:ln w="12700">
+            <a:solidFill>
+              <a:srgbClr val="B4C7D2"/>
+            </a:solidFill>
+          </a:ln>
+          <a:effectLst/>
+        </p:spPr>
+      </p:cxnSp>
+      <p:cxnSp>
+        <p:nvCxnSpPr>
+          <p:cNvPr id="21" name="C4-E34 line 19" descr="sci-ppt:o019"/>
+          <p:cNvCxnSpPr/>
+          <p:nvPr/>
+        </p:nvCxnSpPr>
+        <p:spPr>
+          <a:xfrm>
+            <a:off x="11704320" y="1371600"/>
+            <a:ext cx="0" cy="3474720"/>
+          </a:xfrm>
+          <a:prstGeom prst="line">
+            <a:avLst/>
+          </a:prstGeom>
+          <a:ln w="7620">
+            <a:solidFill>
+              <a:srgbClr val="2E4756"/>
+            </a:solidFill>
+          </a:ln>
+          <a:effectLst/>
+        </p:spPr>
+      </p:cxnSp>
+      <p:sp>
+        <p:nvSpPr>
+          <p:cNvPr id="22" name="C4-E34 text 20" descr="sci-ppt:o020"/>
+          <p:cNvSpPr txBox="1"/>
+          <p:nvPr/>
+        </p:nvSpPr>
+        <p:spPr>
+          <a:xfrm>
+            <a:off x="11247120" y="4928616"/>
+            <a:ext cx="914400" cy="208407"/>
+          </a:xfrm>
+          <a:prstGeom prst="rect">
+            <a:avLst/>
+          </a:prstGeom>
+          <a:noFill/>
+          <a:effectLst/>
+        </p:spPr>
+        <p:txBody>
+          <a:bodyPr wrap="none" lIns="18288" rIns="18288" tIns="18288" bIns="18288" anchor="t">
+            <a:spAutoFit/>
+          </a:bodyPr>
+          <a:lstStyle/>
+          <a:p>
+            <a:pPr algn="ctr">
+              <a:spcAft>
+                <a:spcPts val="0"/>
+              </a:spcAft>
+            </a:pPr>
+            <a:r>
+              <a:rPr sz="1050" b="0" i="0">
+                <a:solidFill>
+                  <a:srgbClr val="B4C7D2"/>
+                </a:solidFill>
+                <a:latin typeface="Arial"/>
+              </a:rPr>
+              <a:t>5</a:t>
+            </a:r>
+          </a:p>
+        </p:txBody>
+      </p:sp>
+      <p:cxnSp>
+        <p:nvCxnSpPr>
+          <p:cNvPr id="23" name="C4-E34 line 21" descr="sci-ppt:o021"/>
+          <p:cNvCxnSpPr/>
+          <p:nvPr/>
+        </p:nvCxnSpPr>
+        <p:spPr>
+          <a:xfrm>
+            <a:off x="7251192" y="4846320"/>
+            <a:ext cx="64008" cy="0"/>
+          </a:xfrm>
+          <a:prstGeom prst="line">
+            <a:avLst/>
+          </a:prstGeom>
+          <a:ln w="12700">
+            <a:solidFill>
+              <a:srgbClr val="B4C7D2"/>
+            </a:solidFill>
+          </a:ln>
+          <a:effectLst/>
+        </p:spPr>
+      </p:cxnSp>
+      <p:cxnSp>
+        <p:nvCxnSpPr>
+          <p:cNvPr id="24" name="C4-E34 line 22" descr="sci-ppt:o022"/>
+          <p:cNvCxnSpPr/>
+          <p:nvPr/>
+        </p:nvCxnSpPr>
+        <p:spPr>
+          <a:xfrm>
+            <a:off x="7251192" y="4074160"/>
+            <a:ext cx="64008" cy="0"/>
+          </a:xfrm>
+          <a:prstGeom prst="line">
+            <a:avLst/>
+          </a:prstGeom>
+          <a:ln w="12700">
+            <a:solidFill>
+              <a:srgbClr val="B4C7D2"/>
+            </a:solidFill>
+          </a:ln>
+          <a:effectLst/>
+        </p:spPr>
+      </p:cxnSp>
+      <p:cxnSp>
+        <p:nvCxnSpPr>
+          <p:cNvPr id="25" name="C4-E34 line 23" descr="sci-ppt:o023"/>
+          <p:cNvCxnSpPr/>
+          <p:nvPr/>
+        </p:nvCxnSpPr>
+        <p:spPr>
+          <a:xfrm>
+            <a:off x="7315200" y="4074160"/>
+            <a:ext cx="4389120" cy="0"/>
+          </a:xfrm>
+          <a:prstGeom prst="line">
+            <a:avLst/>
+          </a:prstGeom>
+          <a:ln w="7620">
+            <a:solidFill>
+              <a:srgbClr val="2E4756"/>
+            </a:solidFill>
+          </a:ln>
+          <a:effectLst/>
+        </p:spPr>
+      </p:cxnSp>
+      <p:sp>
+        <p:nvSpPr>
+          <p:cNvPr id="26" name="C4-E34 text 24" descr="sci-ppt:o024"/>
+          <p:cNvSpPr txBox="1"/>
+          <p:nvPr/>
+        </p:nvSpPr>
+        <p:spPr>
+          <a:xfrm>
+            <a:off x="6446520" y="3991864"/>
+            <a:ext cx="777240" cy="208407"/>
+          </a:xfrm>
+          <a:prstGeom prst="rect">
+            <a:avLst/>
+          </a:prstGeom>
+          <a:noFill/>
+          <a:effectLst/>
+        </p:spPr>
+        <p:txBody>
+          <a:bodyPr wrap="none" lIns="18288" rIns="18288" tIns="18288" bIns="18288" anchor="t">
+            <a:spAutoFit/>
+          </a:bodyPr>
+          <a:lstStyle/>
+          <a:p>
+            <a:pPr algn="r">
+              <a:spcAft>
+                <a:spcPts val="0"/>
+              </a:spcAft>
+            </a:pPr>
+            <a:r>
+              <a:rPr sz="1050" b="0" i="0">
+                <a:solidFill>
+                  <a:srgbClr val="B4C7D2"/>
+                </a:solidFill>
+                <a:latin typeface="Arial"/>
+              </a:rPr>
+              <a:t>2</a:t>
+            </a:r>
+          </a:p>
+        </p:txBody>
+      </p:sp>
+      <p:cxnSp>
+        <p:nvCxnSpPr>
+          <p:cNvPr id="27" name="C4-E34 line 25" descr="sci-ppt:o025"/>
+          <p:cNvCxnSpPr/>
+          <p:nvPr/>
+        </p:nvCxnSpPr>
+        <p:spPr>
+          <a:xfrm>
+            <a:off x="7251192" y="3302000"/>
+            <a:ext cx="64008" cy="0"/>
+          </a:xfrm>
+          <a:prstGeom prst="line">
+            <a:avLst/>
+          </a:prstGeom>
+          <a:ln w="12700">
+            <a:solidFill>
+              <a:srgbClr val="B4C7D2"/>
+            </a:solidFill>
+          </a:ln>
+          <a:effectLst/>
+        </p:spPr>
+      </p:cxnSp>
+      <p:cxnSp>
+        <p:nvCxnSpPr>
+          <p:cNvPr id="28" name="C4-E34 line 26" descr="sci-ppt:o026"/>
+          <p:cNvCxnSpPr/>
+          <p:nvPr/>
+        </p:nvCxnSpPr>
+        <p:spPr>
+          <a:xfrm>
+            <a:off x="7315200" y="3302000"/>
+            <a:ext cx="4389120" cy="0"/>
+          </a:xfrm>
+          <a:prstGeom prst="line">
+            <a:avLst/>
+          </a:prstGeom>
+          <a:ln w="7620">
+            <a:solidFill>
+              <a:srgbClr val="2E4756"/>
+            </a:solidFill>
+          </a:ln>
+          <a:effectLst/>
+        </p:spPr>
+      </p:cxnSp>
+      <p:sp>
+        <p:nvSpPr>
+          <p:cNvPr id="29" name="C4-E34 text 27" descr="sci-ppt:o027"/>
+          <p:cNvSpPr txBox="1"/>
+          <p:nvPr/>
+        </p:nvSpPr>
+        <p:spPr>
+          <a:xfrm>
+            <a:off x="6446520" y="3219704"/>
+            <a:ext cx="777240" cy="208407"/>
+          </a:xfrm>
+          <a:prstGeom prst="rect">
+            <a:avLst/>
+          </a:prstGeom>
+          <a:noFill/>
+          <a:effectLst/>
+        </p:spPr>
+        <p:txBody>
+          <a:bodyPr wrap="none" lIns="18288" rIns="18288" tIns="18288" bIns="18288" anchor="t">
+            <a:spAutoFit/>
+          </a:bodyPr>
+          <a:lstStyle/>
+          <a:p>
+            <a:pPr algn="r">
+              <a:spcAft>
+                <a:spcPts val="0"/>
+              </a:spcAft>
+            </a:pPr>
+            <a:r>
+              <a:rPr sz="1050" b="0" i="0">
+                <a:solidFill>
+                  <a:srgbClr val="B4C7D2"/>
+                </a:solidFill>
+                <a:latin typeface="Arial"/>
+              </a:rPr>
+              <a:t>4</a:t>
+            </a:r>
+          </a:p>
+        </p:txBody>
+      </p:sp>
+      <p:cxnSp>
+        <p:nvCxnSpPr>
+          <p:cNvPr id="30" name="C4-E34 line 28" descr="sci-ppt:o028"/>
+          <p:cNvCxnSpPr/>
+          <p:nvPr/>
+        </p:nvCxnSpPr>
+        <p:spPr>
+          <a:xfrm>
+            <a:off x="7251192" y="2529840"/>
+            <a:ext cx="64008" cy="0"/>
+          </a:xfrm>
+          <a:prstGeom prst="line">
+            <a:avLst/>
+          </a:prstGeom>
+          <a:ln w="12700">
+            <a:solidFill>
+              <a:srgbClr val="B4C7D2"/>
+            </a:solidFill>
+          </a:ln>
+          <a:effectLst/>
+        </p:spPr>
+      </p:cxnSp>
+      <p:cxnSp>
+        <p:nvCxnSpPr>
+          <p:cNvPr id="31" name="C4-E34 line 29" descr="sci-ppt:o029"/>
+          <p:cNvCxnSpPr/>
+          <p:nvPr/>
+        </p:nvCxnSpPr>
+        <p:spPr>
+          <a:xfrm>
+            <a:off x="7315200" y="2529840"/>
+            <a:ext cx="4389120" cy="0"/>
+          </a:xfrm>
+          <a:prstGeom prst="line">
+            <a:avLst/>
+          </a:prstGeom>
+          <a:ln w="7620">
+            <a:solidFill>
+              <a:srgbClr val="2E4756"/>
+            </a:solidFill>
+          </a:ln>
+          <a:effectLst/>
+        </p:spPr>
+      </p:cxnSp>
+      <p:sp>
+        <p:nvSpPr>
+          <p:cNvPr id="32" name="C4-E34 text 30" descr="sci-ppt:o030"/>
+          <p:cNvSpPr txBox="1"/>
+          <p:nvPr/>
+        </p:nvSpPr>
+        <p:spPr>
+          <a:xfrm>
+            <a:off x="6446520" y="2447544"/>
+            <a:ext cx="777240" cy="208407"/>
+          </a:xfrm>
+          <a:prstGeom prst="rect">
+            <a:avLst/>
+          </a:prstGeom>
+          <a:noFill/>
+          <a:effectLst/>
+        </p:spPr>
+        <p:txBody>
+          <a:bodyPr wrap="none" lIns="18288" rIns="18288" tIns="18288" bIns="18288" anchor="t">
+            <a:spAutoFit/>
+          </a:bodyPr>
+          <a:lstStyle/>
+          <a:p>
+            <a:pPr algn="r">
+              <a:spcAft>
+                <a:spcPts val="0"/>
+              </a:spcAft>
+            </a:pPr>
+            <a:r>
+              <a:rPr sz="1050" b="0" i="0">
+                <a:solidFill>
+                  <a:srgbClr val="B4C7D2"/>
+                </a:solidFill>
+                <a:latin typeface="Arial"/>
+              </a:rPr>
+              <a:t>6</a:t>
+            </a:r>
+          </a:p>
+        </p:txBody>
+      </p:sp>
+      <p:cxnSp>
+        <p:nvCxnSpPr>
+          <p:cNvPr id="33" name="C4-E34 line 31" descr="sci-ppt:o031"/>
+          <p:cNvCxnSpPr/>
+          <p:nvPr/>
+        </p:nvCxnSpPr>
+        <p:spPr>
+          <a:xfrm>
+            <a:off x="7251192" y="1757680"/>
+            <a:ext cx="64008" cy="0"/>
+          </a:xfrm>
+          <a:prstGeom prst="line">
+            <a:avLst/>
+          </a:prstGeom>
+          <a:ln w="12700">
+            <a:solidFill>
+              <a:srgbClr val="B4C7D2"/>
+            </a:solidFill>
+          </a:ln>
+          <a:effectLst/>
+        </p:spPr>
+      </p:cxnSp>
+      <p:cxnSp>
+        <p:nvCxnSpPr>
+          <p:cNvPr id="34" name="C4-E34 line 32" descr="sci-ppt:o032"/>
+          <p:cNvCxnSpPr/>
+          <p:nvPr/>
+        </p:nvCxnSpPr>
+        <p:spPr>
+          <a:xfrm>
+            <a:off x="7315200" y="1757680"/>
+            <a:ext cx="4389120" cy="0"/>
+          </a:xfrm>
+          <a:prstGeom prst="line">
+            <a:avLst/>
+          </a:prstGeom>
+          <a:ln w="7620">
+            <a:solidFill>
+              <a:srgbClr val="2E4756"/>
+            </a:solidFill>
+          </a:ln>
+          <a:effectLst/>
+        </p:spPr>
+      </p:cxnSp>
+      <p:sp>
+        <p:nvSpPr>
+          <p:cNvPr id="35" name="C4-E34 text 33" descr="sci-ppt:o033"/>
+          <p:cNvSpPr txBox="1"/>
+          <p:nvPr/>
+        </p:nvSpPr>
+        <p:spPr>
+          <a:xfrm>
+            <a:off x="6446520" y="1675384"/>
+            <a:ext cx="777240" cy="208407"/>
+          </a:xfrm>
+          <a:prstGeom prst="rect">
+            <a:avLst/>
+          </a:prstGeom>
+          <a:noFill/>
+          <a:effectLst/>
+        </p:spPr>
+        <p:txBody>
+          <a:bodyPr wrap="none" lIns="18288" rIns="18288" tIns="18288" bIns="18288" anchor="t">
+            <a:spAutoFit/>
+          </a:bodyPr>
+          <a:lstStyle/>
+          <a:p>
+            <a:pPr algn="r">
+              <a:spcAft>
+                <a:spcPts val="0"/>
+              </a:spcAft>
+            </a:pPr>
+            <a:r>
+              <a:rPr sz="1050" b="0" i="0">
+                <a:solidFill>
+                  <a:srgbClr val="B4C7D2"/>
+                </a:solidFill>
+                <a:latin typeface="Arial"/>
+              </a:rPr>
+              <a:t>8</a:t>
+            </a:r>
+          </a:p>
+        </p:txBody>
+      </p:sp>
+      <p:sp>
+        <p:nvSpPr>
+          <p:cNvPr id="36" name="C4-E34 text 34" descr="sci-ppt:o034"/>
+          <p:cNvSpPr txBox="1"/>
+          <p:nvPr/>
+        </p:nvSpPr>
+        <p:spPr>
+          <a:xfrm>
+            <a:off x="7315200" y="5129783"/>
+            <a:ext cx="4389120" cy="231648"/>
+          </a:xfrm>
+          <a:prstGeom prst="rect">
+            <a:avLst/>
+          </a:prstGeom>
+          <a:noFill/>
+          <a:effectLst/>
+        </p:spPr>
+        <p:txBody>
+          <a:bodyPr wrap="none" lIns="18288" rIns="18288" tIns="18288" bIns="18288" anchor="t">
+            <a:spAutoFit/>
+          </a:bodyPr>
+          <a:lstStyle/>
+          <a:p>
+            <a:pPr algn="ctr">
+              <a:spcAft>
+                <a:spcPts val="0"/>
+              </a:spcAft>
+            </a:pPr>
+            <a:r>
+              <a:rPr sz="1200" b="0" i="0">
+                <a:solidFill>
+                  <a:srgbClr val="E7F0F3"/>
+                </a:solidFill>
+                <a:latin typeface="Arial"/>
+              </a:rPr>
+              <a:t>launch error θ  (degrees)</a:t>
+            </a:r>
+          </a:p>
+        </p:txBody>
+      </p:sp>
+      <p:sp>
+        <p:nvSpPr>
+          <p:cNvPr id="37" name="C4-E34 text 35" descr="sci-ppt:o035"/>
+          <p:cNvSpPr txBox="1"/>
+          <p:nvPr/>
+        </p:nvSpPr>
+        <p:spPr>
+          <a:xfrm>
+            <a:off x="6766560" y="1024128"/>
+            <a:ext cx="4389120" cy="231648"/>
+          </a:xfrm>
+          <a:prstGeom prst="rect">
+            <a:avLst/>
+          </a:prstGeom>
+          <a:noFill/>
+          <a:effectLst/>
+        </p:spPr>
+        <p:txBody>
+          <a:bodyPr wrap="none" lIns="18288" rIns="18288" tIns="18288" bIns="18288" anchor="t">
             <a:spAutoFit/>
           </a:bodyPr>
           <a:lstStyle/>
@@ -3297,27 +4111,397 @@
               </a:spcAft>
             </a:pPr>
             <a:r>
-              <a:rPr sz="1800" b="0" i="0">
+              <a:rPr sz="1200" b="0" i="0">
                 <a:solidFill>
                   <a:srgbClr val="E7F0F3"/>
                 </a:solidFill>
                 <a:latin typeface="Arial"/>
               </a:rPr>
-              <a:t>Δx</a:t>
-            </a:r>
-          </a:p>
-        </p:txBody>
-      </p:sp>
-      <p:sp>
-        <p:nvSpPr>
-          <p:cNvPr id="9" name="C4-E34 text 7" descr="sci-ppt:o007"/>
+              <a:t>Δx  (µm)</a:t>
+            </a:r>
+          </a:p>
+        </p:txBody>
+      </p:sp>
+      <p:sp>
+        <p:nvSpPr>
+          <p:cNvPr id="38" name="C4-E34 polygon 36" descr="sci-ppt:o036"/>
+          <p:cNvSpPr/>
+          <p:nvPr/>
+        </p:nvSpPr>
+        <p:spPr>
+          <a:xfrm>
+            <a:off x="7315200" y="1468557"/>
+            <a:ext cx="4389120" cy="3377763"/>
+          </a:xfrm>
+          <a:custGeom>
+            <a:avLst/>
+            <a:gdLst/>
+            <a:ahLst/>
+            <a:cxnLst/>
+            <a:rect l="l" t="t" r="r" b="b"/>
+            <a:pathLst>
+              <a:path w="4389120" h="3377763">
+                <a:moveTo>
+                  <a:pt x="0" y="3377763"/>
+                </a:moveTo>
+                <a:lnTo>
+                  <a:pt x="44334" y="3343730"/>
+                </a:lnTo>
+                <a:lnTo>
+                  <a:pt x="88669" y="3309698"/>
+                </a:lnTo>
+                <a:lnTo>
+                  <a:pt x="133003" y="3275666"/>
+                </a:lnTo>
+                <a:lnTo>
+                  <a:pt x="177338" y="3241633"/>
+                </a:lnTo>
+                <a:lnTo>
+                  <a:pt x="221672" y="3207601"/>
+                </a:lnTo>
+                <a:lnTo>
+                  <a:pt x="266007" y="3173568"/>
+                </a:lnTo>
+                <a:lnTo>
+                  <a:pt x="310341" y="3139534"/>
+                </a:lnTo>
+                <a:lnTo>
+                  <a:pt x="354676" y="3105501"/>
+                </a:lnTo>
+                <a:lnTo>
+                  <a:pt x="399010" y="3071467"/>
+                </a:lnTo>
+                <a:lnTo>
+                  <a:pt x="443345" y="3037432"/>
+                </a:lnTo>
+                <a:lnTo>
+                  <a:pt x="487680" y="3003397"/>
+                </a:lnTo>
+                <a:lnTo>
+                  <a:pt x="532014" y="2969361"/>
+                </a:lnTo>
+                <a:lnTo>
+                  <a:pt x="576349" y="2935325"/>
+                </a:lnTo>
+                <a:lnTo>
+                  <a:pt x="620683" y="2901288"/>
+                </a:lnTo>
+                <a:lnTo>
+                  <a:pt x="665018" y="2867250"/>
+                </a:lnTo>
+                <a:lnTo>
+                  <a:pt x="709352" y="2833212"/>
+                </a:lnTo>
+                <a:lnTo>
+                  <a:pt x="753687" y="2799173"/>
+                </a:lnTo>
+                <a:lnTo>
+                  <a:pt x="798021" y="2765132"/>
+                </a:lnTo>
+                <a:lnTo>
+                  <a:pt x="842356" y="2731091"/>
+                </a:lnTo>
+                <a:lnTo>
+                  <a:pt x="886690" y="2697049"/>
+                </a:lnTo>
+                <a:lnTo>
+                  <a:pt x="931025" y="2663006"/>
+                </a:lnTo>
+                <a:lnTo>
+                  <a:pt x="975360" y="2628961"/>
+                </a:lnTo>
+                <a:lnTo>
+                  <a:pt x="1019694" y="2594916"/>
+                </a:lnTo>
+                <a:lnTo>
+                  <a:pt x="1064029" y="2560869"/>
+                </a:lnTo>
+                <a:lnTo>
+                  <a:pt x="1108363" y="2526821"/>
+                </a:lnTo>
+                <a:lnTo>
+                  <a:pt x="1152698" y="2492771"/>
+                </a:lnTo>
+                <a:lnTo>
+                  <a:pt x="1197032" y="2458721"/>
+                </a:lnTo>
+                <a:lnTo>
+                  <a:pt x="1241367" y="2424669"/>
+                </a:lnTo>
+                <a:lnTo>
+                  <a:pt x="1285701" y="2390615"/>
+                </a:lnTo>
+                <a:lnTo>
+                  <a:pt x="1330036" y="2356560"/>
+                </a:lnTo>
+                <a:lnTo>
+                  <a:pt x="1374370" y="2322503"/>
+                </a:lnTo>
+                <a:lnTo>
+                  <a:pt x="1418705" y="2288445"/>
+                </a:lnTo>
+                <a:lnTo>
+                  <a:pt x="1463040" y="2254384"/>
+                </a:lnTo>
+                <a:lnTo>
+                  <a:pt x="1507374" y="2220323"/>
+                </a:lnTo>
+                <a:lnTo>
+                  <a:pt x="1551709" y="2186259"/>
+                </a:lnTo>
+                <a:lnTo>
+                  <a:pt x="1596043" y="2152193"/>
+                </a:lnTo>
+                <a:lnTo>
+                  <a:pt x="1640378" y="2118126"/>
+                </a:lnTo>
+                <a:lnTo>
+                  <a:pt x="1684712" y="2084057"/>
+                </a:lnTo>
+                <a:lnTo>
+                  <a:pt x="1729047" y="2049985"/>
+                </a:lnTo>
+                <a:lnTo>
+                  <a:pt x="1773381" y="2015912"/>
+                </a:lnTo>
+                <a:lnTo>
+                  <a:pt x="1817716" y="1981836"/>
+                </a:lnTo>
+                <a:lnTo>
+                  <a:pt x="1862050" y="1947758"/>
+                </a:lnTo>
+                <a:lnTo>
+                  <a:pt x="1906385" y="1913679"/>
+                </a:lnTo>
+                <a:lnTo>
+                  <a:pt x="1950720" y="1879596"/>
+                </a:lnTo>
+                <a:lnTo>
+                  <a:pt x="1995054" y="1845512"/>
+                </a:lnTo>
+                <a:lnTo>
+                  <a:pt x="2039389" y="1811425"/>
+                </a:lnTo>
+                <a:lnTo>
+                  <a:pt x="2083723" y="1777335"/>
+                </a:lnTo>
+                <a:lnTo>
+                  <a:pt x="2128058" y="1743243"/>
+                </a:lnTo>
+                <a:lnTo>
+                  <a:pt x="2172392" y="1709149"/>
+                </a:lnTo>
+                <a:lnTo>
+                  <a:pt x="2216727" y="1675052"/>
+                </a:lnTo>
+                <a:lnTo>
+                  <a:pt x="2261061" y="1640952"/>
+                </a:lnTo>
+                <a:lnTo>
+                  <a:pt x="2305396" y="1606850"/>
+                </a:lnTo>
+                <a:lnTo>
+                  <a:pt x="2349730" y="1572745"/>
+                </a:lnTo>
+                <a:lnTo>
+                  <a:pt x="2394065" y="1538637"/>
+                </a:lnTo>
+                <a:lnTo>
+                  <a:pt x="2438400" y="1504526"/>
+                </a:lnTo>
+                <a:lnTo>
+                  <a:pt x="2482734" y="1470412"/>
+                </a:lnTo>
+                <a:lnTo>
+                  <a:pt x="2527069" y="1436296"/>
+                </a:lnTo>
+                <a:lnTo>
+                  <a:pt x="2571403" y="1402176"/>
+                </a:lnTo>
+                <a:lnTo>
+                  <a:pt x="2615738" y="1368053"/>
+                </a:lnTo>
+                <a:lnTo>
+                  <a:pt x="2660072" y="1333927"/>
+                </a:lnTo>
+                <a:lnTo>
+                  <a:pt x="2704407" y="1299798"/>
+                </a:lnTo>
+                <a:lnTo>
+                  <a:pt x="2748741" y="1265666"/>
+                </a:lnTo>
+                <a:lnTo>
+                  <a:pt x="2793076" y="1231530"/>
+                </a:lnTo>
+                <a:lnTo>
+                  <a:pt x="2837410" y="1197391"/>
+                </a:lnTo>
+                <a:lnTo>
+                  <a:pt x="2881745" y="1163248"/>
+                </a:lnTo>
+                <a:lnTo>
+                  <a:pt x="2926080" y="1129103"/>
+                </a:lnTo>
+                <a:lnTo>
+                  <a:pt x="2970414" y="1094953"/>
+                </a:lnTo>
+                <a:lnTo>
+                  <a:pt x="3014749" y="1060800"/>
+                </a:lnTo>
+                <a:lnTo>
+                  <a:pt x="3059083" y="1026644"/>
+                </a:lnTo>
+                <a:lnTo>
+                  <a:pt x="3103418" y="992484"/>
+                </a:lnTo>
+                <a:lnTo>
+                  <a:pt x="3147752" y="958320"/>
+                </a:lnTo>
+                <a:lnTo>
+                  <a:pt x="3192087" y="924152"/>
+                </a:lnTo>
+                <a:lnTo>
+                  <a:pt x="3236421" y="889980"/>
+                </a:lnTo>
+                <a:lnTo>
+                  <a:pt x="3280756" y="855805"/>
+                </a:lnTo>
+                <a:lnTo>
+                  <a:pt x="3325090" y="821626"/>
+                </a:lnTo>
+                <a:lnTo>
+                  <a:pt x="3369425" y="787442"/>
+                </a:lnTo>
+                <a:lnTo>
+                  <a:pt x="3413760" y="753255"/>
+                </a:lnTo>
+                <a:lnTo>
+                  <a:pt x="3458094" y="719063"/>
+                </a:lnTo>
+                <a:lnTo>
+                  <a:pt x="3502429" y="684868"/>
+                </a:lnTo>
+                <a:lnTo>
+                  <a:pt x="3546763" y="650668"/>
+                </a:lnTo>
+                <a:lnTo>
+                  <a:pt x="3591098" y="616464"/>
+                </a:lnTo>
+                <a:lnTo>
+                  <a:pt x="3635432" y="582255"/>
+                </a:lnTo>
+                <a:lnTo>
+                  <a:pt x="3679767" y="548043"/>
+                </a:lnTo>
+                <a:lnTo>
+                  <a:pt x="3724101" y="513825"/>
+                </a:lnTo>
+                <a:lnTo>
+                  <a:pt x="3768436" y="479604"/>
+                </a:lnTo>
+                <a:lnTo>
+                  <a:pt x="3812770" y="445378"/>
+                </a:lnTo>
+                <a:lnTo>
+                  <a:pt x="3857105" y="411147"/>
+                </a:lnTo>
+                <a:lnTo>
+                  <a:pt x="3901440" y="376911"/>
+                </a:lnTo>
+                <a:lnTo>
+                  <a:pt x="3945774" y="342671"/>
+                </a:lnTo>
+                <a:lnTo>
+                  <a:pt x="3990109" y="308426"/>
+                </a:lnTo>
+                <a:lnTo>
+                  <a:pt x="4034443" y="274177"/>
+                </a:lnTo>
+                <a:lnTo>
+                  <a:pt x="4078778" y="239922"/>
+                </a:lnTo>
+                <a:lnTo>
+                  <a:pt x="4123112" y="205663"/>
+                </a:lnTo>
+                <a:lnTo>
+                  <a:pt x="4167447" y="171398"/>
+                </a:lnTo>
+                <a:lnTo>
+                  <a:pt x="4211781" y="137129"/>
+                </a:lnTo>
+                <a:lnTo>
+                  <a:pt x="4256116" y="102855"/>
+                </a:lnTo>
+                <a:lnTo>
+                  <a:pt x="4300450" y="68575"/>
+                </a:lnTo>
+                <a:lnTo>
+                  <a:pt x="4344785" y="34290"/>
+                </a:lnTo>
+                <a:lnTo>
+                  <a:pt x="4389120" y="0"/>
+                </a:lnTo>
+              </a:path>
+            </a:pathLst>
+          </a:custGeom>
+          <a:noFill/>
+          <a:ln w="38100">
+            <a:solidFill>
+              <a:srgbClr val="8EDBD4"/>
+            </a:solidFill>
+          </a:ln>
+          <a:effectLst/>
+        </p:spPr>
+        <p:txBody>
+          <a:bodyPr rtlCol="0" anchor="ctr"/>
+          <a:lstStyle/>
+          <a:p>
+            <a:pPr algn="ctr"/>
+          </a:p>
+        </p:txBody>
+      </p:sp>
+      <p:sp>
+        <p:nvSpPr>
+          <p:cNvPr id="39" name="C4-E34 ellipse 37" descr="sci-ppt:o037"/>
+          <p:cNvSpPr/>
+          <p:nvPr/>
+        </p:nvSpPr>
+        <p:spPr>
+          <a:xfrm>
+            <a:off x="8119872" y="4099262"/>
+            <a:ext cx="146304" cy="146304"/>
+          </a:xfrm>
+          <a:prstGeom prst="ellipse">
+            <a:avLst/>
+          </a:prstGeom>
+          <a:solidFill>
+            <a:srgbClr val="F2B880"/>
+          </a:solidFill>
+          <a:ln w="12700">
+            <a:solidFill>
+              <a:srgbClr val="F2B880"/>
+            </a:solidFill>
+          </a:ln>
+          <a:effectLst/>
+        </p:spPr>
+        <p:txBody>
+          <a:bodyPr rtlCol="0" anchor="ctr"/>
+          <a:lstStyle/>
+          <a:p>
+            <a:pPr algn="ctr"/>
+          </a:p>
+        </p:txBody>
+      </p:sp>
+      <p:sp>
+        <p:nvSpPr>
+          <p:cNvPr id="40" name="C4-E34 text 38" descr="sci-ppt:o038"/>
           <p:cNvSpPr txBox="1"/>
           <p:nvPr/>
         </p:nvSpPr>
         <p:spPr>
           <a:xfrm>
-            <a:off x="411480" y="2011680"/>
-            <a:ext cx="1463040" cy="365760"/>
+            <a:off x="8330184" y="4355294"/>
+            <a:ext cx="2560320" cy="231648"/>
           </a:xfrm>
           <a:prstGeom prst="rect">
             <a:avLst/>
@@ -3326,7 +4510,7 @@
           <a:effectLst/>
         </p:spPr>
         <p:txBody>
-          <a:bodyPr wrap="square" lIns="27432" rIns="27432" tIns="18288" bIns="18288" anchor="ctr">
+          <a:bodyPr wrap="none" lIns="18288" rIns="18288" tIns="18288" bIns="18288" anchor="t">
             <a:spAutoFit/>
           </a:bodyPr>
           <a:lstStyle/>
@@ -3337,27 +4521,59 @@
               </a:spcAft>
             </a:pPr>
             <a:r>
-              <a:rPr sz="1800" b="0" i="0">
+              <a:rPr sz="1200" b="0" i="0">
                 <a:solidFill>
-                  <a:srgbClr val="E7F0F3"/>
+                  <a:srgbClr val="F2B880"/>
                 </a:solidFill>
                 <a:latin typeface="Arial"/>
               </a:rPr>
-              <a:t>H_f</a:t>
-            </a:r>
-          </a:p>
-        </p:txBody>
-      </p:sp>
-      <p:sp>
-        <p:nvSpPr>
-          <p:cNvPr id="10" name="C4-E34 text 8" descr="sci-ppt:o008"/>
+              <a:t>θ = 1°: Δx = 1.7455 µm</a:t>
+            </a:r>
+          </a:p>
+        </p:txBody>
+      </p:sp>
+      <p:sp>
+        <p:nvSpPr>
+          <p:cNvPr id="41" name="C4-E34 round_rect 39" descr="sci-ppt:o039"/>
+          <p:cNvSpPr/>
+          <p:nvPr/>
+        </p:nvSpPr>
+        <p:spPr>
+          <a:xfrm>
+            <a:off x="365760" y="914400"/>
+            <a:ext cx="5943600" cy="4846320"/>
+          </a:xfrm>
+          <a:prstGeom prst="roundRect">
+            <a:avLst/>
+          </a:prstGeom>
+          <a:solidFill>
+            <a:srgbClr val="213E4B"/>
+          </a:solidFill>
+          <a:ln w="20320">
+            <a:solidFill>
+              <a:srgbClr val="8EDBD4"/>
+            </a:solidFill>
+          </a:ln>
+          <a:effectLst/>
+        </p:spPr>
+        <p:txBody>
+          <a:bodyPr rtlCol="0" anchor="ctr"/>
+          <a:lstStyle/>
+          <a:p>
+            <a:pPr algn="ctr"/>
+          </a:p>
+        </p:txBody>
+      </p:sp>
+      <p:sp>
+        <p:nvSpPr>
+          <p:cNvPr id="42" name="C4-E34 text 40" descr="sci-ppt:o040"/>
           <p:cNvSpPr txBox="1"/>
           <p:nvPr/>
         </p:nvSpPr>
         <p:spPr>
           <a:xfrm>
-            <a:off x="2286000" y="1554480"/>
-            <a:ext cx="1828800" cy="274320"/>
+            <a:off x="475488" y="969264"/>
+            <a:ext cx="5724144" cy="254889"/>
           </a:xfrm>
           <a:prstGeom prst="rect">
             <a:avLst/>
@@ -3366,7 +4582,7 @@
           <a:effectLst/>
         </p:spPr>
         <p:txBody>
-          <a:bodyPr wrap="square" lIns="27432" rIns="27432" tIns="18288" bIns="18288" anchor="ctr">
+          <a:bodyPr wrap="none" lIns="18288" rIns="18288" tIns="18288" bIns="18288" anchor="t">
             <a:spAutoFit/>
           </a:bodyPr>
           <a:lstStyle/>
@@ -3377,105 +4593,59 @@
               </a:spcAft>
             </a:pPr>
             <a:r>
-              <a:rPr sz="1800" b="0" i="0">
+              <a:rPr sz="1350" b="1" i="0">
                 <a:solidFill>
-                  <a:srgbClr val="E7F0F3"/>
+                  <a:srgbClr val="8EDBD4"/>
                 </a:solidFill>
                 <a:latin typeface="Arial"/>
               </a:rPr>
-              <a:t>θ</a:t>
-            </a:r>
-          </a:p>
-        </p:txBody>
-      </p:sp>
-      <p:sp>
-        <p:nvSpPr>
-          <p:cNvPr id="11" name="C4-E34 text 9" descr="sci-ppt:o009"/>
-          <p:cNvSpPr txBox="1"/>
-          <p:nvPr/>
-        </p:nvSpPr>
-        <p:spPr>
-          <a:xfrm>
-            <a:off x="5852160" y="1463040"/>
-            <a:ext cx="5029200" cy="914400"/>
+              <a:t>Ballistic placement</a:t>
+            </a:r>
+          </a:p>
+        </p:txBody>
+      </p:sp>
+      <p:sp>
+        <p:nvSpPr>
+          <p:cNvPr id="43" name="C4-E34 rect 41" descr="sci-ppt:o041"/>
+          <p:cNvSpPr/>
+          <p:nvPr/>
+        </p:nvSpPr>
+        <p:spPr>
+          <a:xfrm>
+            <a:off x="731520" y="1554480"/>
+            <a:ext cx="5212080" cy="274320"/>
           </a:xfrm>
           <a:prstGeom prst="rect">
             <a:avLst/>
           </a:prstGeom>
-          <a:noFill/>
-          <a:effectLst/>
-        </p:spPr>
-        <p:txBody>
-          <a:bodyPr wrap="square" lIns="27432" rIns="27432" tIns="18288" bIns="18288" anchor="ctr">
-            <a:spAutoFit/>
-          </a:bodyPr>
-          <a:lstStyle/>
-          <a:p>
-            <a:pPr algn="l">
-              <a:spcAft>
-                <a:spcPts val="0"/>
-              </a:spcAft>
-            </a:pPr>
-            <a:r>
-              <a:rPr sz="2000" b="0" i="0">
-                <a:solidFill>
-                  <a:srgbClr val="E7F0F3"/>
-                </a:solidFill>
-                <a:latin typeface="Arial"/>
-              </a:rPr>
-              <a:t>Normal gap H_f</a:t>
-            </a:r>
-          </a:p>
-          <a:p>
-            <a:pPr algn="l">
-              <a:spcAft>
-                <a:spcPts val="0"/>
-              </a:spcAft>
-            </a:pPr>
-            <a:r>
-              <a:rPr sz="2000" b="0" i="0">
-                <a:solidFill>
-                  <a:srgbClr val="E7F0F3"/>
-                </a:solidFill>
-                <a:latin typeface="Arial"/>
-              </a:rPr>
-              <a:t>Lateral error Δx = H_f tan θ</a:t>
-            </a:r>
-          </a:p>
-        </p:txBody>
-      </p:sp>
-      <p:cxnSp>
-        <p:nvCxnSpPr>
-          <p:cNvPr id="12" name="C4-E34 line 10" descr="sci-ppt:o010"/>
-          <p:cNvCxnSpPr/>
-          <p:nvPr/>
-        </p:nvCxnSpPr>
-        <p:spPr>
-          <a:xfrm>
-            <a:off x="274320" y="3977639"/>
-            <a:ext cx="11612880" cy="0"/>
-          </a:xfrm>
-          <a:prstGeom prst="line">
-            <a:avLst/>
-          </a:prstGeom>
-          <a:ln w="12700">
+          <a:solidFill>
+            <a:srgbClr val="3A5362"/>
+          </a:solidFill>
+          <a:ln w="17780">
             <a:solidFill>
-              <a:srgbClr val="405967"/>
+              <a:srgbClr val="B4C7D2"/>
             </a:solidFill>
           </a:ln>
           <a:effectLst/>
         </p:spPr>
-      </p:cxnSp>
-      <p:sp>
-        <p:nvSpPr>
-          <p:cNvPr id="13" name="C4-E34 text 11" descr="sci-ppt:o011"/>
+        <p:txBody>
+          <a:bodyPr rtlCol="0" anchor="ctr"/>
+          <a:lstStyle/>
+          <a:p>
+            <a:pPr algn="ctr"/>
+          </a:p>
+        </p:txBody>
+      </p:sp>
+      <p:sp>
+        <p:nvSpPr>
+          <p:cNvPr id="44" name="C4-E34 text 42" descr="sci-ppt:o042"/>
           <p:cNvSpPr txBox="1"/>
           <p:nvPr/>
         </p:nvSpPr>
         <p:spPr>
           <a:xfrm>
-            <a:off x="320040" y="4096512"/>
-            <a:ext cx="5715000" cy="246888"/>
+            <a:off x="731520" y="1280160"/>
+            <a:ext cx="2194560" cy="223900"/>
           </a:xfrm>
           <a:prstGeom prst="rect">
             <a:avLst/>
@@ -3484,7 +4654,7 @@
           <a:effectLst/>
         </p:spPr>
         <p:txBody>
-          <a:bodyPr wrap="square" lIns="27432" rIns="27432" tIns="18288" bIns="18288" anchor="ctr">
+          <a:bodyPr wrap="none" lIns="18288" rIns="18288" tIns="18288" bIns="18288" anchor="t">
             <a:spAutoFit/>
           </a:bodyPr>
           <a:lstStyle/>
@@ -3501,21 +4671,53 @@
                 </a:solidFill>
                 <a:latin typeface="Arial"/>
               </a:rPr>
-              <a:t>• H_f — payload normal flight gap</a:t>
-            </a:r>
-          </a:p>
-        </p:txBody>
-      </p:sp>
-      <p:sp>
-        <p:nvSpPr>
-          <p:cNvPr id="14" name="C4-E34 text 12" descr="sci-ppt:o012"/>
+              <a:t>exit plane (jet source)</a:t>
+            </a:r>
+          </a:p>
+        </p:txBody>
+      </p:sp>
+      <p:sp>
+        <p:nvSpPr>
+          <p:cNvPr id="45" name="C4-E34 rect 43" descr="sci-ppt:o043"/>
+          <p:cNvSpPr/>
+          <p:nvPr/>
+        </p:nvSpPr>
+        <p:spPr>
+          <a:xfrm>
+            <a:off x="731520" y="4023360"/>
+            <a:ext cx="5212080" cy="274320"/>
+          </a:xfrm>
+          <a:prstGeom prst="rect">
+            <a:avLst/>
+          </a:prstGeom>
+          <a:solidFill>
+            <a:srgbClr val="3A5362"/>
+          </a:solidFill>
+          <a:ln w="17780">
+            <a:solidFill>
+              <a:srgbClr val="B4C7D2"/>
+            </a:solidFill>
+          </a:ln>
+          <a:effectLst/>
+        </p:spPr>
+        <p:txBody>
+          <a:bodyPr rtlCol="0" anchor="ctr"/>
+          <a:lstStyle/>
+          <a:p>
+            <a:pPr algn="ctr"/>
+          </a:p>
+        </p:txBody>
+      </p:sp>
+      <p:sp>
+        <p:nvSpPr>
+          <p:cNvPr id="46" name="C4-E34 text 44" descr="sci-ppt:o044"/>
           <p:cNvSpPr txBox="1"/>
           <p:nvPr/>
         </p:nvSpPr>
         <p:spPr>
           <a:xfrm>
-            <a:off x="6217920" y="4096512"/>
-            <a:ext cx="5715000" cy="246888"/>
+            <a:off x="731520" y="4343400"/>
+            <a:ext cx="2194560" cy="223900"/>
           </a:xfrm>
           <a:prstGeom prst="rect">
             <a:avLst/>
@@ -3524,7 +4726,7 @@
           <a:effectLst/>
         </p:spPr>
         <p:txBody>
-          <a:bodyPr wrap="square" lIns="27432" rIns="27432" tIns="18288" bIns="18288" anchor="ctr">
+          <a:bodyPr wrap="none" lIns="18288" rIns="18288" tIns="18288" bIns="18288" anchor="t">
             <a:spAutoFit/>
           </a:bodyPr>
           <a:lstStyle/>
@@ -3541,21 +4743,134 @@
                 </a:solidFill>
                 <a:latin typeface="Arial"/>
               </a:rPr>
-              <a:t>• θ — departure angle</a:t>
-            </a:r>
-          </a:p>
-        </p:txBody>
-      </p:sp>
-      <p:sp>
-        <p:nvSpPr>
-          <p:cNvPr id="15" name="C4-E34 text 13" descr="sci-ppt:o013"/>
+              <a:t>film plane</a:t>
+            </a:r>
+          </a:p>
+        </p:txBody>
+      </p:sp>
+      <p:cxnSp>
+        <p:nvCxnSpPr>
+          <p:cNvPr id="47" name="C4-E34 line 45" descr="sci-ppt:o045"/>
+          <p:cNvCxnSpPr/>
+          <p:nvPr/>
+        </p:nvCxnSpPr>
+        <p:spPr>
+          <a:xfrm>
+            <a:off x="2377440" y="1828800"/>
+            <a:ext cx="0" cy="2194560"/>
+          </a:xfrm>
+          <a:prstGeom prst="line">
+            <a:avLst/>
+          </a:prstGeom>
+          <a:ln w="16510">
+            <a:solidFill>
+              <a:srgbClr val="B4C7D2"/>
+            </a:solidFill>
+            <a:prstDash val="dash"/>
+          </a:ln>
+          <a:effectLst/>
+        </p:spPr>
+      </p:cxnSp>
+      <p:cxnSp>
+        <p:nvCxnSpPr>
+          <p:cNvPr id="48" name="C4-E34 arrow 46" descr="sci-ppt:o046"/>
+          <p:cNvCxnSpPr/>
+          <p:nvPr/>
+        </p:nvCxnSpPr>
+        <p:spPr>
+          <a:xfrm>
+            <a:off x="2377440" y="1828800"/>
+            <a:ext cx="685800" cy="2148839"/>
+          </a:xfrm>
+          <a:prstGeom prst="line">
+            <a:avLst/>
+          </a:prstGeom>
+          <a:ln w="44450">
+            <a:solidFill>
+              <a:srgbClr val="F2B880"/>
+            </a:solidFill>
+            <a:headEnd type="none" w="med" len="med"/>
+            <a:tailEnd type="triangle" w="med" len="med"/>
+          </a:ln>
+          <a:effectLst/>
+        </p:spPr>
+      </p:cxnSp>
+      <p:cxnSp>
+        <p:nvCxnSpPr>
+          <p:cNvPr id="49" name="C4-E34 line 47" descr="sci-ppt:o047"/>
+          <p:cNvCxnSpPr/>
+          <p:nvPr/>
+        </p:nvCxnSpPr>
+        <p:spPr>
+          <a:xfrm>
+            <a:off x="640080" y="1828800"/>
+            <a:ext cx="0" cy="2194560"/>
+          </a:xfrm>
+          <a:prstGeom prst="line">
+            <a:avLst/>
+          </a:prstGeom>
+          <a:ln w="16510">
+            <a:solidFill>
+              <a:srgbClr val="B4C7D2"/>
+            </a:solidFill>
+          </a:ln>
+          <a:effectLst/>
+        </p:spPr>
+      </p:cxnSp>
+      <p:cxnSp>
+        <p:nvCxnSpPr>
+          <p:cNvPr id="50" name="C4-E34 line 48" descr="sci-ppt:o048"/>
+          <p:cNvCxnSpPr/>
+          <p:nvPr/>
+        </p:nvCxnSpPr>
+        <p:spPr>
+          <a:xfrm flipH="1">
+            <a:off x="576071" y="1828800"/>
+            <a:ext cx="128017" cy="0"/>
+          </a:xfrm>
+          <a:prstGeom prst="line">
+            <a:avLst/>
+          </a:prstGeom>
+          <a:ln w="16510">
+            <a:solidFill>
+              <a:srgbClr val="B4C7D2"/>
+            </a:solidFill>
+          </a:ln>
+          <a:effectLst/>
+        </p:spPr>
+      </p:cxnSp>
+      <p:cxnSp>
+        <p:nvCxnSpPr>
+          <p:cNvPr id="51" name="C4-E34 line 49" descr="sci-ppt:o049"/>
+          <p:cNvCxnSpPr/>
+          <p:nvPr/>
+        </p:nvCxnSpPr>
+        <p:spPr>
+          <a:xfrm flipH="1">
+            <a:off x="576071" y="4023360"/>
+            <a:ext cx="128017" cy="0"/>
+          </a:xfrm>
+          <a:prstGeom prst="line">
+            <a:avLst/>
+          </a:prstGeom>
+          <a:ln w="16510">
+            <a:solidFill>
+              <a:srgbClr val="B4C7D2"/>
+            </a:solidFill>
+          </a:ln>
+          <a:effectLst/>
+        </p:spPr>
+      </p:cxnSp>
+      <p:sp>
+        <p:nvSpPr>
+          <p:cNvPr id="52" name="C4-E34 text 50" descr="sci-ppt:o050"/>
           <p:cNvSpPr txBox="1"/>
           <p:nvPr/>
         </p:nvSpPr>
         <p:spPr>
           <a:xfrm>
-            <a:off x="320040" y="4329684"/>
-            <a:ext cx="5715000" cy="246888"/>
+            <a:off x="-457200" y="2834640"/>
+            <a:ext cx="1828800" cy="231648"/>
           </a:xfrm>
           <a:prstGeom prst="rect">
             <a:avLst/>
@@ -3564,7 +4879,153 @@
           <a:effectLst/>
         </p:spPr>
         <p:txBody>
-          <a:bodyPr wrap="square" lIns="27432" rIns="27432" tIns="18288" bIns="18288" anchor="ctr">
+          <a:bodyPr wrap="none" lIns="18288" rIns="18288" tIns="18288" bIns="18288" anchor="t">
+            <a:spAutoFit/>
+          </a:bodyPr>
+          <a:lstStyle/>
+          <a:p>
+            <a:pPr algn="ctr">
+              <a:spcAft>
+                <a:spcPts val="0"/>
+              </a:spcAft>
+            </a:pPr>
+            <a:r>
+              <a:rPr sz="1200" b="0" i="0">
+                <a:solidFill>
+                  <a:srgbClr val="B4C7D2"/>
+                </a:solidFill>
+                <a:latin typeface="Arial"/>
+              </a:rPr>
+              <a:t>H_f</a:t>
+            </a:r>
+          </a:p>
+        </p:txBody>
+      </p:sp>
+      <p:cxnSp>
+        <p:nvCxnSpPr>
+          <p:cNvPr id="53" name="C4-E34 line 51" descr="sci-ppt:o051"/>
+          <p:cNvCxnSpPr/>
+          <p:nvPr/>
+        </p:nvCxnSpPr>
+        <p:spPr>
+          <a:xfrm>
+            <a:off x="2377440" y="4526280"/>
+            <a:ext cx="731520" cy="0"/>
+          </a:xfrm>
+          <a:prstGeom prst="line">
+            <a:avLst/>
+          </a:prstGeom>
+          <a:ln w="16510">
+            <a:solidFill>
+              <a:srgbClr val="F28BA0"/>
+            </a:solidFill>
+          </a:ln>
+          <a:effectLst/>
+        </p:spPr>
+      </p:cxnSp>
+      <p:cxnSp>
+        <p:nvCxnSpPr>
+          <p:cNvPr id="54" name="C4-E34 line 52" descr="sci-ppt:o052"/>
+          <p:cNvCxnSpPr/>
+          <p:nvPr/>
+        </p:nvCxnSpPr>
+        <p:spPr>
+          <a:xfrm>
+            <a:off x="2377440" y="4462272"/>
+            <a:ext cx="0" cy="128016"/>
+          </a:xfrm>
+          <a:prstGeom prst="line">
+            <a:avLst/>
+          </a:prstGeom>
+          <a:ln w="16510">
+            <a:solidFill>
+              <a:srgbClr val="F28BA0"/>
+            </a:solidFill>
+          </a:ln>
+          <a:effectLst/>
+        </p:spPr>
+      </p:cxnSp>
+      <p:cxnSp>
+        <p:nvCxnSpPr>
+          <p:cNvPr id="55" name="C4-E34 line 53" descr="sci-ppt:o053"/>
+          <p:cNvCxnSpPr/>
+          <p:nvPr/>
+        </p:nvCxnSpPr>
+        <p:spPr>
+          <a:xfrm>
+            <a:off x="3108960" y="4462272"/>
+            <a:ext cx="0" cy="128016"/>
+          </a:xfrm>
+          <a:prstGeom prst="line">
+            <a:avLst/>
+          </a:prstGeom>
+          <a:ln w="16510">
+            <a:solidFill>
+              <a:srgbClr val="F28BA0"/>
+            </a:solidFill>
+          </a:ln>
+          <a:effectLst/>
+        </p:spPr>
+      </p:cxnSp>
+      <p:sp>
+        <p:nvSpPr>
+          <p:cNvPr id="56" name="C4-E34 text 54" descr="sci-ppt:o054"/>
+          <p:cNvSpPr txBox="1"/>
+          <p:nvPr/>
+        </p:nvSpPr>
+        <p:spPr>
+          <a:xfrm>
+            <a:off x="1828800" y="4248150"/>
+            <a:ext cx="1828800" cy="239395"/>
+          </a:xfrm>
+          <a:prstGeom prst="rect">
+            <a:avLst/>
+          </a:prstGeom>
+          <a:noFill/>
+          <a:effectLst/>
+        </p:spPr>
+        <p:txBody>
+          <a:bodyPr wrap="none" lIns="18288" rIns="18288" tIns="18288" bIns="18288" anchor="t">
+            <a:spAutoFit/>
+          </a:bodyPr>
+          <a:lstStyle/>
+          <a:p>
+            <a:pPr algn="ctr">
+              <a:spcAft>
+                <a:spcPts val="0"/>
+              </a:spcAft>
+            </a:pPr>
+            <a:r>
+              <a:rPr sz="1250" b="0" i="0">
+                <a:solidFill>
+                  <a:srgbClr val="F28BA0"/>
+                </a:solidFill>
+                <a:latin typeface="Arial"/>
+              </a:rPr>
+              <a:t>Δx</a:t>
+            </a:r>
+          </a:p>
+        </p:txBody>
+      </p:sp>
+      <p:sp>
+        <p:nvSpPr>
+          <p:cNvPr id="57" name="C4-E34 text 55" descr="sci-ppt:o055"/>
+          <p:cNvSpPr txBox="1"/>
+          <p:nvPr/>
+        </p:nvSpPr>
+        <p:spPr>
+          <a:xfrm>
+            <a:off x="3291840" y="2560320"/>
+            <a:ext cx="2560320" cy="262636"/>
+          </a:xfrm>
+          <a:prstGeom prst="rect">
+            <a:avLst/>
+          </a:prstGeom>
+          <a:noFill/>
+          <a:effectLst/>
+        </p:spPr>
+        <p:txBody>
+          <a:bodyPr wrap="none" lIns="18288" rIns="18288" tIns="18288" bIns="18288" anchor="t">
             <a:spAutoFit/>
           </a:bodyPr>
           <a:lstStyle/>
@@ -3575,27 +5036,27 @@
               </a:spcAft>
             </a:pPr>
             <a:r>
-              <a:rPr sz="1150" b="0" i="0">
+              <a:rPr sz="1400" b="1" i="0">
                 <a:solidFill>
-                  <a:srgbClr val="B4C7D2"/>
+                  <a:srgbClr val="F2B880"/>
                 </a:solidFill>
                 <a:latin typeface="Arial"/>
               </a:rPr>
-              <a:t>• Δx — lateral placement error</a:t>
-            </a:r>
-          </a:p>
-        </p:txBody>
-      </p:sp>
-      <p:sp>
-        <p:nvSpPr>
-          <p:cNvPr id="16" name="C4-E34 text 14" descr="sci-ppt:o014"/>
+              <a:t>θ</a:t>
+            </a:r>
+          </a:p>
+        </p:txBody>
+      </p:sp>
+      <p:sp>
+        <p:nvSpPr>
+          <p:cNvPr id="58" name="C4-E34 text 56" descr="sci-ppt:o056"/>
           <p:cNvSpPr txBox="1"/>
           <p:nvPr/>
         </p:nvSpPr>
         <p:spPr>
           <a:xfrm>
-            <a:off x="6217920" y="4329684"/>
-            <a:ext cx="5715000" cy="246888"/>
+            <a:off x="548640" y="4983480"/>
+            <a:ext cx="5577840" cy="239395"/>
           </a:xfrm>
           <a:prstGeom prst="rect">
             <a:avLst/>
@@ -3604,7 +5065,7 @@
           <a:effectLst/>
         </p:spPr>
         <p:txBody>
-          <a:bodyPr wrap="square" lIns="27432" rIns="27432" tIns="18288" bIns="18288" anchor="ctr">
+          <a:bodyPr wrap="none" lIns="18288" rIns="18288" tIns="18288" bIns="18288" anchor="t">
             <a:spAutoFit/>
           </a:bodyPr>
           <a:lstStyle/>
@@ -3615,27 +5076,27 @@
               </a:spcAft>
             </a:pPr>
             <a:r>
-              <a:rPr sz="1150" b="0" i="0">
+              <a:rPr sz="1250" b="1" i="0">
                 <a:solidFill>
-                  <a:srgbClr val="B4C7D2"/>
+                  <a:srgbClr val="E7F0F3"/>
                 </a:solidFill>
                 <a:latin typeface="Arial"/>
               </a:rPr>
-              <a:t>• target normal ↓ receiver</a:t>
-            </a:r>
-          </a:p>
-        </p:txBody>
-      </p:sp>
-      <p:sp>
-        <p:nvSpPr>
-          <p:cNvPr id="17" name="C4-E34 text 15" descr="sci-ppt:o015"/>
+              <a:t>Δx = H_f tan θ,   H_f = 100 µm,   θ = 1° ⇒ Δx = 1.74551 µm</a:t>
+            </a:r>
+          </a:p>
+        </p:txBody>
+      </p:sp>
+      <p:sp>
+        <p:nvSpPr>
+          <p:cNvPr id="59" name="C4-E34 text 57" descr="sci-ppt:o057"/>
           <p:cNvSpPr txBox="1"/>
           <p:nvPr/>
         </p:nvSpPr>
         <p:spPr>
           <a:xfrm>
-            <a:off x="320040" y="4562856"/>
-            <a:ext cx="5715000" cy="246888"/>
+            <a:off x="6583680" y="5623560"/>
+            <a:ext cx="5120640" cy="417576"/>
           </a:xfrm>
           <a:prstGeom prst="rect">
             <a:avLst/>
@@ -3644,7 +5105,7 @@
           <a:effectLst/>
         </p:spPr>
         <p:txBody>
-          <a:bodyPr wrap="square" lIns="27432" rIns="27432" tIns="18288" bIns="18288" anchor="ctr">
+          <a:bodyPr wrap="none" lIns="18288" rIns="18288" tIns="18288" bIns="18288" anchor="t">
             <a:spAutoFit/>
           </a:bodyPr>
           <a:lstStyle/>
@@ -3655,39 +5116,15 @@
               </a:spcAft>
             </a:pPr>
             <a:r>
-              <a:rPr sz="1150" b="0" i="0">
+              <a:rPr sz="1200" b="0" i="0">
                 <a:solidFill>
-                  <a:srgbClr val="B4C7D2"/>
+                  <a:srgbClr val="F2B880"/>
                 </a:solidFill>
                 <a:latin typeface="Arial"/>
               </a:rPr>
-              <a:t>• H_f = 100 μm, θ = 1°</a:t>
-            </a:r>
-          </a:p>
-        </p:txBody>
-      </p:sp>
-      <p:sp>
-        <p:nvSpPr>
-          <p:cNvPr id="18" name="C4-E34 text 16" descr="sci-ppt:o016"/>
-          <p:cNvSpPr txBox="1"/>
-          <p:nvPr/>
-        </p:nvSpPr>
-        <p:spPr>
-          <a:xfrm>
-            <a:off x="320040" y="5596128"/>
-            <a:ext cx="11430000" cy="292608"/>
-          </a:xfrm>
-          <a:prstGeom prst="rect">
-            <a:avLst/>
-          </a:prstGeom>
-          <a:noFill/>
-          <a:effectLst/>
-        </p:spPr>
-        <p:txBody>
-          <a:bodyPr wrap="square" lIns="27432" rIns="27432" tIns="18288" bIns="18288" anchor="ctr">
-            <a:spAutoFit/>
-          </a:bodyPr>
-          <a:lstStyle/>
+              <a:t>A receiving gap converts a small angular error into a placement</a:t>
+            </a:r>
+          </a:p>
           <a:p>
             <a:pPr algn="l">
               <a:spcAft>
@@ -3695,27 +5132,27 @@
               </a:spcAft>
             </a:pPr>
             <a:r>
-              <a:rPr sz="1150" b="0" i="0">
+              <a:rPr sz="1200" b="0" i="0">
                 <a:solidFill>
-                  <a:srgbClr val="8EDBD4"/>
+                  <a:srgbClr val="F2B880"/>
                 </a:solidFill>
                 <a:latin typeface="Arial"/>
               </a:rPr>
-              <a:t>A 1° departure error gives about 1.75 μm offset in this example.</a:t>
-            </a:r>
-          </a:p>
-        </p:txBody>
-      </p:sp>
-      <p:sp>
-        <p:nvSpPr>
-          <p:cNvPr id="19" name="C4-E34 text 17" descr="sci-ppt:o017"/>
+              <a:t>error; compare Δx with the feature size.</a:t>
+            </a:r>
+          </a:p>
+        </p:txBody>
+      </p:sp>
+      <p:sp>
+        <p:nvSpPr>
+          <p:cNvPr id="60" name="C4-E34 text 58" descr="sci-ppt:o058"/>
           <p:cNvSpPr txBox="1"/>
           <p:nvPr/>
         </p:nvSpPr>
         <p:spPr>
           <a:xfrm>
-            <a:off x="320040" y="6473952"/>
-            <a:ext cx="11430000" cy="256032"/>
+            <a:off x="320040" y="6510528"/>
+            <a:ext cx="11521440" cy="200660"/>
           </a:xfrm>
           <a:prstGeom prst="rect">
             <a:avLst/>
@@ -3724,7 +5161,7 @@
           <a:effectLst/>
         </p:spPr>
         <p:txBody>
-          <a:bodyPr wrap="square" lIns="27432" rIns="27432" tIns="18288" bIns="18288" anchor="ctr">
+          <a:bodyPr wrap="none" lIns="18288" rIns="18288" tIns="18288" bIns="18288" anchor="t">
             <a:spAutoFit/>
           </a:bodyPr>
           <a:lstStyle/>
@@ -3741,7 +5178,7 @@
                 </a:solidFill>
                 <a:latin typeface="Arial"/>
               </a:rPr>
-              <a:t>Model schematic; geometry is not to scale.</a:t>
+              <a:t>Ballistic placement of Eq. C4-E34 (the sketch angle is exaggerated).</a:t>
             </a:r>
           </a:p>
         </p:txBody>
